--- a/pptx-asset-library/decks/01_tables/TBL_bulk_group2_v1.pptx
+++ b/pptx-asset-library/decks/01_tables/TBL_bulk_group2_v1.pptx
@@ -3189,7 +3189,7 @@
           <a:graphicData uri="http://schemas.openxmlformats.org/drawingml/2006/table">
             <a:tbl>
               <a:tblPr>
-                <a:tableStyleId>{2D5ABB26-0587-4C30-8999-92F81FD0307C}</a:tableStyleId>
+                <a:tableStyleId>{5C22544A-7EE6-4342-B048-85BDC9FD1C3A}</a:tableStyleId>
               </a:tblPr>
               <a:tblGrid>
                 <a:gridCol w="2313432"/>
@@ -4661,7 +4661,7 @@
           <a:graphicData uri="http://schemas.openxmlformats.org/drawingml/2006/table">
             <a:tbl>
               <a:tblPr>
-                <a:tableStyleId>{2D5ABB26-0587-4C30-8999-92F81FD0307C}</a:tableStyleId>
+                <a:tableStyleId>{5C22544A-7EE6-4342-B048-85BDC9FD1C3A}</a:tableStyleId>
               </a:tblPr>
               <a:tblGrid>
                 <a:gridCol w="2313432"/>
@@ -6133,7 +6133,7 @@
           <a:graphicData uri="http://schemas.openxmlformats.org/drawingml/2006/table">
             <a:tbl>
               <a:tblPr>
-                <a:tableStyleId>{2D5ABB26-0587-4C30-8999-92F81FD0307C}</a:tableStyleId>
+                <a:tableStyleId>{5C22544A-7EE6-4342-B048-85BDC9FD1C3A}</a:tableStyleId>
               </a:tblPr>
               <a:tblGrid>
                 <a:gridCol w="2313432"/>
@@ -7832,7 +7832,7 @@
           <a:graphicData uri="http://schemas.openxmlformats.org/drawingml/2006/table">
             <a:tbl>
               <a:tblPr>
-                <a:tableStyleId>{2D5ABB26-0587-4C30-8999-92F81FD0307C}</a:tableStyleId>
+                <a:tableStyleId>{5C22544A-7EE6-4342-B048-85BDC9FD1C3A}</a:tableStyleId>
               </a:tblPr>
               <a:tblGrid>
                 <a:gridCol w="2313432"/>
@@ -9758,7 +9758,7 @@
           <a:graphicData uri="http://schemas.openxmlformats.org/drawingml/2006/table">
             <a:tbl>
               <a:tblPr>
-                <a:tableStyleId>{2D5ABB26-0587-4C30-8999-92F81FD0307C}</a:tableStyleId>
+                <a:tableStyleId>{5C22544A-7EE6-4342-B048-85BDC9FD1C3A}</a:tableStyleId>
               </a:tblPr>
               <a:tblGrid>
                 <a:gridCol w="2313432"/>
@@ -11457,7 +11457,7 @@
           <a:graphicData uri="http://schemas.openxmlformats.org/drawingml/2006/table">
             <a:tbl>
               <a:tblPr>
-                <a:tableStyleId>{2D5ABB26-0587-4C30-8999-92F81FD0307C}</a:tableStyleId>
+                <a:tableStyleId>{5C22544A-7EE6-4342-B048-85BDC9FD1C3A}</a:tableStyleId>
               </a:tblPr>
               <a:tblGrid>
                 <a:gridCol w="2313432"/>
@@ -13383,7 +13383,7 @@
           <a:graphicData uri="http://schemas.openxmlformats.org/drawingml/2006/table">
             <a:tbl>
               <a:tblPr>
-                <a:tableStyleId>{2D5ABB26-0587-4C30-8999-92F81FD0307C}</a:tableStyleId>
+                <a:tableStyleId>{5C22544A-7EE6-4342-B048-85BDC9FD1C3A}</a:tableStyleId>
               </a:tblPr>
               <a:tblGrid>
                 <a:gridCol w="2313432"/>
@@ -14855,7 +14855,7 @@
           <a:graphicData uri="http://schemas.openxmlformats.org/drawingml/2006/table">
             <a:tbl>
               <a:tblPr>
-                <a:tableStyleId>{2D5ABB26-0587-4C30-8999-92F81FD0307C}</a:tableStyleId>
+                <a:tableStyleId>{5C22544A-7EE6-4342-B048-85BDC9FD1C3A}</a:tableStyleId>
               </a:tblPr>
               <a:tblGrid>
                 <a:gridCol w="2313432"/>
@@ -16554,7 +16554,7 @@
           <a:graphicData uri="http://schemas.openxmlformats.org/drawingml/2006/table">
             <a:tbl>
               <a:tblPr>
-                <a:tableStyleId>{2D5ABB26-0587-4C30-8999-92F81FD0307C}</a:tableStyleId>
+                <a:tableStyleId>{5C22544A-7EE6-4342-B048-85BDC9FD1C3A}</a:tableStyleId>
               </a:tblPr>
               <a:tblGrid>
                 <a:gridCol w="2313432"/>
@@ -18480,7 +18480,7 @@
           <a:graphicData uri="http://schemas.openxmlformats.org/drawingml/2006/table">
             <a:tbl>
               <a:tblPr>
-                <a:tableStyleId>{2D5ABB26-0587-4C30-8999-92F81FD0307C}</a:tableStyleId>
+                <a:tableStyleId>{5C22544A-7EE6-4342-B048-85BDC9FD1C3A}</a:tableStyleId>
               </a:tblPr>
               <a:tblGrid>
                 <a:gridCol w="2313432"/>
@@ -19952,7 +19952,7 @@
           <a:graphicData uri="http://schemas.openxmlformats.org/drawingml/2006/table">
             <a:tbl>
               <a:tblPr>
-                <a:tableStyleId>{2D5ABB26-0587-4C30-8999-92F81FD0307C}</a:tableStyleId>
+                <a:tableStyleId>{5C22544A-7EE6-4342-B048-85BDC9FD1C3A}</a:tableStyleId>
               </a:tblPr>
               <a:tblGrid>
                 <a:gridCol w="2313432"/>
@@ -21651,7 +21651,7 @@
           <a:graphicData uri="http://schemas.openxmlformats.org/drawingml/2006/table">
             <a:tbl>
               <a:tblPr>
-                <a:tableStyleId>{2D5ABB26-0587-4C30-8999-92F81FD0307C}</a:tableStyleId>
+                <a:tableStyleId>{5C22544A-7EE6-4342-B048-85BDC9FD1C3A}</a:tableStyleId>
               </a:tblPr>
               <a:tblGrid>
                 <a:gridCol w="2313432"/>
